--- a/2025/2021204042황인성_컴퓨터그래픽스_과제2/2021204042황인성_과제2_보고서.pptx
+++ b/2025/2021204042황인성_컴퓨터그래픽스_과제2/2021204042황인성_과제2_보고서.pptx
@@ -113,6 +113,11 @@
       </a:defRPr>
     </a:lvl9pPr>
   </p:defaultTextStyle>
+  <p:extLst>
+    <p:ext uri="{EFAFB233-063F-42B5-8137-9DF3F51BA10A}">
+      <p15:sldGuideLst xmlns:p15="http://schemas.microsoft.com/office/powerpoint/2012/main"/>
+    </p:ext>
+  </p:extLst>
 </p:presentation>
 </file>
 
@@ -1390,7 +1395,7 @@
           <a:p>
             <a:fld id="{5C22F80E-ADF0-42A0-9356-C481A8417F2D}" type="datetimeFigureOut">
               <a:rPr lang="ko-KR" altLang="en-US" smtClean="0"/>
-              <a:t>2025-05-16</a:t>
+              <a:t>2026-03-12</a:t>
             </a:fld>
             <a:endParaRPr lang="ko-KR" altLang="en-US"/>
           </a:p>
@@ -1495,6 +1500,13 @@
             <a:schemeClr val="lt1"/>
           </a:fontRef>
         </p:style>
+        <p:txBody>
+          <a:bodyPr/>
+          <a:lstStyle/>
+          <a:p>
+            <a:endParaRPr lang="ko-KR" altLang="en-US"/>
+          </a:p>
+        </p:txBody>
       </p:sp>
     </p:spTree>
     <p:extLst>
@@ -1618,7 +1630,7 @@
           <a:p>
             <a:fld id="{5C22F80E-ADF0-42A0-9356-C481A8417F2D}" type="datetimeFigureOut">
               <a:rPr lang="ko-KR" altLang="en-US" smtClean="0"/>
-              <a:t>2025-05-16</a:t>
+              <a:t>2026-03-12</a:t>
             </a:fld>
             <a:endParaRPr lang="ko-KR" altLang="en-US"/>
           </a:p>
@@ -1798,7 +1810,7 @@
           <a:p>
             <a:fld id="{5C22F80E-ADF0-42A0-9356-C481A8417F2D}" type="datetimeFigureOut">
               <a:rPr lang="ko-KR" altLang="en-US" smtClean="0"/>
-              <a:t>2025-05-16</a:t>
+              <a:t>2026-03-12</a:t>
             </a:fld>
             <a:endParaRPr lang="ko-KR" altLang="en-US"/>
           </a:p>
@@ -1968,7 +1980,7 @@
           <a:p>
             <a:fld id="{5C22F80E-ADF0-42A0-9356-C481A8417F2D}" type="datetimeFigureOut">
               <a:rPr lang="ko-KR" altLang="en-US" smtClean="0"/>
-              <a:t>2025-05-16</a:t>
+              <a:t>2026-03-12</a:t>
             </a:fld>
             <a:endParaRPr lang="ko-KR" altLang="en-US"/>
           </a:p>
@@ -2222,7 +2234,7 @@
           <a:p>
             <a:fld id="{5C22F80E-ADF0-42A0-9356-C481A8417F2D}" type="datetimeFigureOut">
               <a:rPr lang="ko-KR" altLang="en-US" smtClean="0"/>
-              <a:t>2025-05-16</a:t>
+              <a:t>2026-03-12</a:t>
             </a:fld>
             <a:endParaRPr lang="ko-KR" altLang="en-US"/>
           </a:p>
@@ -2548,7 +2560,7 @@
           <a:p>
             <a:fld id="{5C22F80E-ADF0-42A0-9356-C481A8417F2D}" type="datetimeFigureOut">
               <a:rPr lang="ko-KR" altLang="en-US" smtClean="0"/>
-              <a:t>2025-05-16</a:t>
+              <a:t>2026-03-12</a:t>
             </a:fld>
             <a:endParaRPr lang="ko-KR" altLang="en-US"/>
           </a:p>
@@ -2999,7 +3011,7 @@
           <a:p>
             <a:fld id="{5C22F80E-ADF0-42A0-9356-C481A8417F2D}" type="datetimeFigureOut">
               <a:rPr lang="ko-KR" altLang="en-US" smtClean="0"/>
-              <a:t>2025-05-16</a:t>
+              <a:t>2026-03-12</a:t>
             </a:fld>
             <a:endParaRPr lang="ko-KR" altLang="en-US"/>
           </a:p>
@@ -3147,7 +3159,7 @@
           <a:p>
             <a:fld id="{5C22F80E-ADF0-42A0-9356-C481A8417F2D}" type="datetimeFigureOut">
               <a:rPr lang="ko-KR" altLang="en-US" smtClean="0"/>
-              <a:t>2025-05-16</a:t>
+              <a:t>2026-03-12</a:t>
             </a:fld>
             <a:endParaRPr lang="ko-KR" altLang="en-US"/>
           </a:p>
@@ -3324,7 +3336,7 @@
           <a:p>
             <a:fld id="{5C22F80E-ADF0-42A0-9356-C481A8417F2D}" type="datetimeFigureOut">
               <a:rPr lang="ko-KR" altLang="en-US" smtClean="0"/>
-              <a:t>2025-05-16</a:t>
+              <a:t>2026-03-12</a:t>
             </a:fld>
             <a:endParaRPr lang="ko-KR" altLang="en-US"/>
           </a:p>
@@ -3611,7 +3623,7 @@
           <a:p>
             <a:fld id="{5C22F80E-ADF0-42A0-9356-C481A8417F2D}" type="datetimeFigureOut">
               <a:rPr lang="ko-KR" altLang="en-US" smtClean="0"/>
-              <a:t>2025-05-16</a:t>
+              <a:t>2026-03-12</a:t>
             </a:fld>
             <a:endParaRPr lang="ko-KR" altLang="en-US"/>
           </a:p>
@@ -3992,6 +4004,13 @@
             <a:schemeClr val="lt1"/>
           </a:fontRef>
         </p:style>
+        <p:txBody>
+          <a:bodyPr/>
+          <a:lstStyle/>
+          <a:p>
+            <a:endParaRPr lang="ko-KR" altLang="en-US"/>
+          </a:p>
+        </p:txBody>
       </p:sp>
       <p:sp>
         <p:nvSpPr>
@@ -4124,7 +4143,7 @@
           <a:p>
             <a:fld id="{5C22F80E-ADF0-42A0-9356-C481A8417F2D}" type="datetimeFigureOut">
               <a:rPr lang="ko-KR" altLang="en-US" smtClean="0"/>
-              <a:t>2025-05-16</a:t>
+              <a:t>2026-03-12</a:t>
             </a:fld>
             <a:endParaRPr lang="ko-KR" altLang="en-US"/>
           </a:p>
